--- a/공유폴더에서작업하는방법.pptx
+++ b/공유폴더에서작업하는방법.pptx
@@ -9,8 +9,6 @@
     <p:sldId id="257" r:id="rId3"/>
     <p:sldId id="258" r:id="rId4"/>
     <p:sldId id="261" r:id="rId5"/>
-    <p:sldId id="259" r:id="rId6"/>
-    <p:sldId id="260" r:id="rId7"/>
   </p:sldIdLst>
   <p:sldSz cx="12192000" cy="6858000"/>
   <p:notesSz cx="6858000" cy="9144000"/>
@@ -142,34 +140,6 @@
     </inkml:brush>
   </inkml:definitions>
   <inkml:trace contextRef="#ctx0" brushRef="#br0">5645 0 24575,'-2'5'0,"-1"-1"0,0 0 0,0 1 0,0-1 0,-1-1 0,1 1 0,-1-1 0,0 1 0,0-1 0,0 0 0,-1 0 0,-5 2 0,-63 23 0,55-22 0,-80 22 0,-1-5 0,-1-3 0,-150 9 0,-312-14 0,532-15 0,-3036-5 0,2934-2 0,-256-46 0,263 31 0,0 4 0,-160-1 0,86 21-1365,157-1-5461</inkml:trace>
-</inkml:ink>
-</file>
-
-<file path=ppt/ink/ink10.xml><?xml version="1.0" encoding="utf-8"?>
-<inkml:ink xmlns:inkml="http://www.w3.org/2003/InkML">
-  <inkml:definitions>
-    <inkml:context xml:id="ctx0">
-      <inkml:inkSource xml:id="inkSrc0">
-        <inkml:traceFormat>
-          <inkml:channel name="X" type="integer" min="-2.14748E9" max="2.14748E9" units="cm"/>
-          <inkml:channel name="Y" type="integer" min="-2.14748E9" max="2.14748E9" units="cm"/>
-          <inkml:channel name="F" type="integer" max="32767" units="dev"/>
-        </inkml:traceFormat>
-        <inkml:channelProperties>
-          <inkml:channelProperty channel="X" name="resolution" value="1000" units="1/cm"/>
-          <inkml:channelProperty channel="Y" name="resolution" value="1000" units="1/cm"/>
-          <inkml:channelProperty channel="F" name="resolution" value="0" units="1/dev"/>
-        </inkml:channelProperties>
-      </inkml:inkSource>
-      <inkml:timestamp xml:id="ts0" timeString="2025-11-20T05:12:48.014"/>
-    </inkml:context>
-    <inkml:brush xml:id="br0">
-      <inkml:brushProperty name="width" value="0.1" units="cm"/>
-      <inkml:brushProperty name="height" value="0.1" units="cm"/>
-      <inkml:brushProperty name="color" value="#E71224"/>
-    </inkml:brush>
-  </inkml:definitions>
-  <inkml:trace contextRef="#ctx0" brushRef="#br0">383 80 24575,'0'-1'0,"0"-1"0,1 0 0,-1 1 0,1-1 0,0 1 0,-1-1 0,1 1 0,0-1 0,0 1 0,0 0 0,0 0 0,0-1 0,0 1 0,0 0 0,1 0 0,-1 0 0,0 0 0,1 0 0,-1 0 0,0 0 0,1 1 0,-1-1 0,1 0 0,1 0 0,45-13 0,-38 12 0,61-11 0,1 3 0,0 3 0,0 3 0,77 7 0,-103-2 0,-30 0 0,1 0 0,-1 2 0,1 0 0,-1 0 0,0 2 0,-1 0 0,1 1 0,-1 0 0,0 1 0,0 1 0,-1 0 0,0 1 0,-1 1 0,0 0 0,0 1 0,-1 0 0,0 1 0,-1 0 0,-1 1 0,0 0 0,-1 1 0,0 0 0,-1 0 0,0 1 0,-1 0 0,-1 0 0,-1 1 0,0 0 0,-1 0 0,0 0 0,-1 0 0,-1 1 0,0 17 0,-2 6 0,-1-1 0,-2 0 0,-15 74 0,13-94 0,-1 0 0,-1 0 0,-1 0 0,0-1 0,-1-1 0,-1 1 0,-1-1 0,0-1 0,-22 24 0,19-24 0,0-1 0,-1-1 0,-1 0 0,0-1 0,-1 0 0,-1-2 0,0 0 0,-25 11 0,-2-3 0,-112 43 0,151-60 0,0-1 0,0 0 0,0 0 0,0-1 0,0 0 0,0 0 0,0 0 0,0-1 0,0 0 0,0 0 0,0 0 0,0-1 0,0 0 0,1 0 0,-1 0 0,-5-4 0,-10-7 0,0 0 0,-32-27 0,27 20 0,-153-97 0,124 85 0,1-3 0,-81-69 0,129 99 0,-18-17 0,1 0 0,1-1 0,-21-30 0,37 43 0,0 1 0,0-1 0,1 0 0,1 0 0,0-1 0,0 0 0,1 1 0,0-1 0,1 0 0,0-1 0,1 1 0,0-18 0,1 28 0,0-12 0,0-1 0,1 1 0,1 0 0,3-15 0,-3 23 0,-1 0 0,1 0 0,1 1 0,-1-1 0,1 1 0,0-1 0,0 1 0,0 0 0,0 0 0,1 0 0,-1 1 0,1-1 0,8-4 0,4-4-97,2 2-1,-1 0 1,2 2-1,-1 0 1,1 0-1,0 2 1,0 0-1,1 2 1,0 0-1,0 1 1,0 1-1,0 0 0,40 4 1,-39-1-6729</inkml:trace>
 </inkml:ink>
 </file>
 
@@ -313,90 +283,6 @@
 </inkml:ink>
 </file>
 
-<file path=ppt/ink/ink7.xml><?xml version="1.0" encoding="utf-8"?>
-<inkml:ink xmlns:inkml="http://www.w3.org/2003/InkML">
-  <inkml:definitions>
-    <inkml:context xml:id="ctx0">
-      <inkml:inkSource xml:id="inkSrc0">
-        <inkml:traceFormat>
-          <inkml:channel name="X" type="integer" min="-2.14748E9" max="2.14748E9" units="cm"/>
-          <inkml:channel name="Y" type="integer" min="-2.14748E9" max="2.14748E9" units="cm"/>
-          <inkml:channel name="F" type="integer" max="32767" units="dev"/>
-        </inkml:traceFormat>
-        <inkml:channelProperties>
-          <inkml:channelProperty channel="X" name="resolution" value="1000" units="1/cm"/>
-          <inkml:channelProperty channel="Y" name="resolution" value="1000" units="1/cm"/>
-          <inkml:channelProperty channel="F" name="resolution" value="0" units="1/dev"/>
-        </inkml:channelProperties>
-      </inkml:inkSource>
-      <inkml:timestamp xml:id="ts0" timeString="2025-11-20T05:11:17.291"/>
-    </inkml:context>
-    <inkml:brush xml:id="br0">
-      <inkml:brushProperty name="width" value="0.1" units="cm"/>
-      <inkml:brushProperty name="height" value="0.1" units="cm"/>
-      <inkml:brushProperty name="color" value="#E71224"/>
-    </inkml:brush>
-  </inkml:definitions>
-  <inkml:trace contextRef="#ctx0" brushRef="#br0">207 31 24575,'21'-1'0,"0"-1"0,29-7 0,35-3 0,-40 10 0,-17-1 0,-1 2 0,1 0 0,-1 2 0,1 1 0,49 11 0,-66-8 0,0 0 0,-1 1 0,1 0 0,-1 0 0,0 1 0,-1 1 0,0 0 0,0 0 0,0 1 0,-1 0 0,-1 0 0,0 1 0,7 11 0,-1 0 0,0 1 0,-2 0 0,-1 1 0,0 0 0,8 33 0,-15-47 0,-1 1 0,0 0 0,0-1 0,-1 1 0,0 0 0,-1 0 0,0 0 0,-1 0 0,0 0 0,0 0 0,-1-1 0,0 1 0,-1 0 0,0-1 0,0 0 0,-1 1 0,0-2 0,-1 1 0,-8 12 0,-4 4 0,-1 0 0,-1-2 0,-41 41 0,51-56 0,0-1 0,-1 0 0,0 0 0,-1-1 0,1-1 0,-1 0 0,0 0 0,-1-1 0,1 0 0,-1-1 0,1 0 0,-22 2 0,-201-2 0,124-5 0,105 2 0,-1 0 0,0-1 0,0 1 0,0-2 0,0 1 0,0 0 0,1-1 0,-1 0 0,1 0 0,-1-1 0,1 0 0,0 0 0,0 0 0,0 0 0,-7-7 0,6 3 0,-1 0 0,1 0 0,0-1 0,1 0 0,0 0 0,0-1 0,1 1 0,-6-17 0,-4-10 0,7 17 0,0 0 0,1 0 0,1 0 0,0-1 0,2 1 0,-2-28 0,4 20 0,-1-4 0,1 0 0,2 0 0,1 0 0,10-47 0,-10 69 0,0 0 0,1 0 0,0 1 0,0-1 0,1 1 0,0 0 0,0 0 0,1 0 0,-1 0 0,2 1 0,-1 0 0,1 0 0,0 0 0,0 1 0,0 0 0,1 0 0,0 1 0,0-1 0,0 2 0,0-1 0,13-4 0,6-2-1365,-5 2-5461</inkml:trace>
-</inkml:ink>
-</file>
-
-<file path=ppt/ink/ink8.xml><?xml version="1.0" encoding="utf-8"?>
-<inkml:ink xmlns:inkml="http://www.w3.org/2003/InkML">
-  <inkml:definitions>
-    <inkml:context xml:id="ctx0">
-      <inkml:inkSource xml:id="inkSrc0">
-        <inkml:traceFormat>
-          <inkml:channel name="X" type="integer" min="-2.14748E9" max="2.14748E9" units="cm"/>
-          <inkml:channel name="Y" type="integer" min="-2.14748E9" max="2.14748E9" units="cm"/>
-          <inkml:channel name="F" type="integer" max="32767" units="dev"/>
-        </inkml:traceFormat>
-        <inkml:channelProperties>
-          <inkml:channelProperty channel="X" name="resolution" value="1000" units="1/cm"/>
-          <inkml:channelProperty channel="Y" name="resolution" value="1000" units="1/cm"/>
-          <inkml:channelProperty channel="F" name="resolution" value="0" units="1/dev"/>
-        </inkml:channelProperties>
-      </inkml:inkSource>
-      <inkml:timestamp xml:id="ts0" timeString="2025-11-20T05:11:20.923"/>
-    </inkml:context>
-    <inkml:brush xml:id="br0">
-      <inkml:brushProperty name="width" value="0.1" units="cm"/>
-      <inkml:brushProperty name="height" value="0.1" units="cm"/>
-      <inkml:brushProperty name="color" value="#E71224"/>
-    </inkml:brush>
-  </inkml:definitions>
-  <inkml:trace contextRef="#ctx0" brushRef="#br0">0 18 24575,'0'-1'0,"0"1"0,0-1 0,1 0 0,-1 0 0,0 0 0,0 1 0,1-1 0,-1 0 0,0 0 0,1 1 0,-1-1 0,1 0 0,-1 1 0,1-1 0,-1 1 0,1-1 0,-1 0 0,1 1 0,0-1 0,-1 1 0,1-1 0,0 1 0,0 0 0,-1-1 0,1 1 0,0 0 0,0 0 0,-1-1 0,1 1 0,0 0 0,0 0 0,0 0 0,1 0 0,0 0 0,0-1 0,1 1 0,-1 1 0,1-1 0,-1 0 0,0 0 0,1 1 0,-1 0 0,0-1 0,1 1 0,3 2 0,22 17 0,-1 1 0,-1 1 0,-1 1 0,34 40 0,-21-22 0,43 45 0,194 187 0,-236-239 0,2-1 0,2-3 0,1-1 0,1-3 0,66 30 0,-81-44-341,1 0 0,0-2-1,41 7 1,-40-12-6485</inkml:trace>
-</inkml:ink>
-</file>
-
-<file path=ppt/ink/ink9.xml><?xml version="1.0" encoding="utf-8"?>
-<inkml:ink xmlns:inkml="http://www.w3.org/2003/InkML">
-  <inkml:definitions>
-    <inkml:context xml:id="ctx0">
-      <inkml:inkSource xml:id="inkSrc0">
-        <inkml:traceFormat>
-          <inkml:channel name="X" type="integer" min="-2.14748E9" max="2.14748E9" units="cm"/>
-          <inkml:channel name="Y" type="integer" min="-2.14748E9" max="2.14748E9" units="cm"/>
-          <inkml:channel name="F" type="integer" max="32767" units="dev"/>
-        </inkml:traceFormat>
-        <inkml:channelProperties>
-          <inkml:channelProperty channel="X" name="resolution" value="1000" units="1/cm"/>
-          <inkml:channelProperty channel="Y" name="resolution" value="1000" units="1/cm"/>
-          <inkml:channelProperty channel="F" name="resolution" value="0" units="1/dev"/>
-        </inkml:channelProperties>
-      </inkml:inkSource>
-      <inkml:timestamp xml:id="ts0" timeString="2025-11-20T05:12:45.282"/>
-    </inkml:context>
-    <inkml:brush xml:id="br0">
-      <inkml:brushProperty name="width" value="0.1" units="cm"/>
-      <inkml:brushProperty name="height" value="0.1" units="cm"/>
-      <inkml:brushProperty name="color" value="#E71224"/>
-    </inkml:brush>
-  </inkml:definitions>
-  <inkml:trace contextRef="#ctx0" brushRef="#br0">181 106 24575,'1'-1'0,"0"0"0,0 0 0,0-1 0,0 1 0,1 0 0,-1 0 0,0 0 0,0 1 0,1-1 0,-1 0 0,1 0 0,-1 1 0,1-1 0,-1 1 0,1-1 0,-1 1 0,1-1 0,-1 1 0,1 0 0,-1 0 0,1 0 0,3 0 0,0 0 0,263-28 0,38-6 0,-219 21 0,111-2 0,-162 15 0,-1 1 0,1 1 0,-1 3 0,1 0 0,67 22 0,-63-12 0,66 36 0,-82-38 0,-1 1 0,-1 1 0,0 2 0,-1 0 0,-1 1 0,0 1 0,25 31 0,-34-35 0,-1 1 0,0 0 0,-1 1 0,-1 0 0,-1 0 0,0 0 0,-1 1 0,-1 0 0,0 1 0,-2-1 0,3 32 0,-4-19 0,-1-1 0,-1 1 0,-6 40 0,4-60 0,0-1 0,0 0 0,-1 0 0,-1-1 0,0 1 0,0-1 0,-1 0 0,0 0 0,0 0 0,-1-1 0,-1 1 0,1-1 0,-14 11 0,11-10 0,-2-2 0,1 1 0,-1-1 0,0-1 0,-1 0 0,0-1 0,-13 5 0,-91 21 0,32-11 0,42-12 0,0-1 0,-1-2 0,1-2 0,-1-2 0,-55-6 0,-11 2 0,75 3 0,-43 1 0,0-3 0,0-3 0,-104-21 0,120 13 0,45 11 0,0 0 0,0-2 0,1 0 0,0 0 0,-1-2 0,1 0 0,1 0 0,-1-2 0,1 1 0,-19-16 0,-135-129 0,157 142 0,0 0 0,0 0 0,1-1 0,0 0 0,1-1 0,0 0 0,1-1 0,1 0 0,0 0 0,0-1 0,1 1 0,1-1 0,0-1 0,1 1 0,1-1 0,0 1 0,1-1 0,1 0 0,0-20 0,1 11-119,-2 11 15,2 1 0,0 0 0,0 0 0,1 0 1,0-1-1,1 1 0,1 0 0,0 0 0,0 1 1,1-1-1,7-14 0,5 5-6722</inkml:trace>
-</inkml:ink>
-</file>
-
 <file path=ppt/slideLayouts/slideLayout1.xml><?xml version="1.0" encoding="utf-8"?>
 <p:sldLayout xmlns:a="http://schemas.openxmlformats.org/drawingml/2006/main" xmlns:r="http://schemas.openxmlformats.org/officeDocument/2006/relationships" xmlns:p="http://schemas.openxmlformats.org/presentationml/2006/main" type="title" preserve="1">
   <p:cSld name="제목 슬라이드">
@@ -544,7 +430,7 @@
           <a:p>
             <a:fld id="{C68CF6FB-5D41-4019-9BCA-062B74D390AE}" type="datetimeFigureOut">
               <a:rPr lang="ko-KR" altLang="en-US" smtClean="0"/>
-              <a:t>2025-11-20</a:t>
+              <a:t>2025-11-21</a:t>
             </a:fld>
             <a:endParaRPr lang="ko-KR" altLang="en-US"/>
           </a:p>
@@ -742,7 +628,7 @@
           <a:p>
             <a:fld id="{C68CF6FB-5D41-4019-9BCA-062B74D390AE}" type="datetimeFigureOut">
               <a:rPr lang="ko-KR" altLang="en-US" smtClean="0"/>
-              <a:t>2025-11-20</a:t>
+              <a:t>2025-11-21</a:t>
             </a:fld>
             <a:endParaRPr lang="ko-KR" altLang="en-US"/>
           </a:p>
@@ -950,7 +836,7 @@
           <a:p>
             <a:fld id="{C68CF6FB-5D41-4019-9BCA-062B74D390AE}" type="datetimeFigureOut">
               <a:rPr lang="ko-KR" altLang="en-US" smtClean="0"/>
-              <a:t>2025-11-20</a:t>
+              <a:t>2025-11-21</a:t>
             </a:fld>
             <a:endParaRPr lang="ko-KR" altLang="en-US"/>
           </a:p>
@@ -1148,7 +1034,7 @@
           <a:p>
             <a:fld id="{C68CF6FB-5D41-4019-9BCA-062B74D390AE}" type="datetimeFigureOut">
               <a:rPr lang="ko-KR" altLang="en-US" smtClean="0"/>
-              <a:t>2025-11-20</a:t>
+              <a:t>2025-11-21</a:t>
             </a:fld>
             <a:endParaRPr lang="ko-KR" altLang="en-US"/>
           </a:p>
@@ -1423,7 +1309,7 @@
           <a:p>
             <a:fld id="{C68CF6FB-5D41-4019-9BCA-062B74D390AE}" type="datetimeFigureOut">
               <a:rPr lang="ko-KR" altLang="en-US" smtClean="0"/>
-              <a:t>2025-11-20</a:t>
+              <a:t>2025-11-21</a:t>
             </a:fld>
             <a:endParaRPr lang="ko-KR" altLang="en-US"/>
           </a:p>
@@ -1688,7 +1574,7 @@
           <a:p>
             <a:fld id="{C68CF6FB-5D41-4019-9BCA-062B74D390AE}" type="datetimeFigureOut">
               <a:rPr lang="ko-KR" altLang="en-US" smtClean="0"/>
-              <a:t>2025-11-20</a:t>
+              <a:t>2025-11-21</a:t>
             </a:fld>
             <a:endParaRPr lang="ko-KR" altLang="en-US"/>
           </a:p>
@@ -2100,7 +1986,7 @@
           <a:p>
             <a:fld id="{C68CF6FB-5D41-4019-9BCA-062B74D390AE}" type="datetimeFigureOut">
               <a:rPr lang="ko-KR" altLang="en-US" smtClean="0"/>
-              <a:t>2025-11-20</a:t>
+              <a:t>2025-11-21</a:t>
             </a:fld>
             <a:endParaRPr lang="ko-KR" altLang="en-US"/>
           </a:p>
@@ -2241,7 +2127,7 @@
           <a:p>
             <a:fld id="{C68CF6FB-5D41-4019-9BCA-062B74D390AE}" type="datetimeFigureOut">
               <a:rPr lang="ko-KR" altLang="en-US" smtClean="0"/>
-              <a:t>2025-11-20</a:t>
+              <a:t>2025-11-21</a:t>
             </a:fld>
             <a:endParaRPr lang="ko-KR" altLang="en-US"/>
           </a:p>
@@ -2354,7 +2240,7 @@
           <a:p>
             <a:fld id="{C68CF6FB-5D41-4019-9BCA-062B74D390AE}" type="datetimeFigureOut">
               <a:rPr lang="ko-KR" altLang="en-US" smtClean="0"/>
-              <a:t>2025-11-20</a:t>
+              <a:t>2025-11-21</a:t>
             </a:fld>
             <a:endParaRPr lang="ko-KR" altLang="en-US"/>
           </a:p>
@@ -2665,7 +2551,7 @@
           <a:p>
             <a:fld id="{C68CF6FB-5D41-4019-9BCA-062B74D390AE}" type="datetimeFigureOut">
               <a:rPr lang="ko-KR" altLang="en-US" smtClean="0"/>
-              <a:t>2025-11-20</a:t>
+              <a:t>2025-11-21</a:t>
             </a:fld>
             <a:endParaRPr lang="ko-KR" altLang="en-US"/>
           </a:p>
@@ -2953,7 +2839,7 @@
           <a:p>
             <a:fld id="{C68CF6FB-5D41-4019-9BCA-062B74D390AE}" type="datetimeFigureOut">
               <a:rPr lang="ko-KR" altLang="en-US" smtClean="0"/>
-              <a:t>2025-11-20</a:t>
+              <a:t>2025-11-21</a:t>
             </a:fld>
             <a:endParaRPr lang="ko-KR" altLang="en-US"/>
           </a:p>
@@ -3194,7 +3080,7 @@
           <a:p>
             <a:fld id="{C68CF6FB-5D41-4019-9BCA-062B74D390AE}" type="datetimeFigureOut">
               <a:rPr lang="ko-KR" altLang="en-US" smtClean="0"/>
-              <a:t>2025-11-20</a:t>
+              <a:t>2025-11-21</a:t>
             </a:fld>
             <a:endParaRPr lang="ko-KR" altLang="en-US"/>
           </a:p>
@@ -4486,669 +4372,6 @@
 </p:sld>
 </file>
 
-<file path=ppt/slides/slide5.xml><?xml version="1.0" encoding="utf-8"?>
-<p:sld xmlns:a="http://schemas.openxmlformats.org/drawingml/2006/main" xmlns:r="http://schemas.openxmlformats.org/officeDocument/2006/relationships" xmlns:p="http://schemas.openxmlformats.org/presentationml/2006/main">
-  <p:cSld>
-    <p:spTree>
-      <p:nvGrpSpPr>
-        <p:cNvPr id="1" name="">
-          <a:extLst>
-            <a:ext uri="{FF2B5EF4-FFF2-40B4-BE49-F238E27FC236}">
-              <a16:creationId xmlns:a16="http://schemas.microsoft.com/office/drawing/2014/main" id="{BE753ADF-06C5-F3F4-F325-A583ED8308D6}"/>
-            </a:ext>
-          </a:extLst>
-        </p:cNvPr>
-        <p:cNvGrpSpPr/>
-        <p:nvPr/>
-      </p:nvGrpSpPr>
-      <p:grpSpPr>
-        <a:xfrm>
-          <a:off x="0" y="0"/>
-          <a:ext cx="0" cy="0"/>
-          <a:chOff x="0" y="0"/>
-          <a:chExt cx="0" cy="0"/>
-        </a:xfrm>
-      </p:grpSpPr>
-      <p:pic>
-        <p:nvPicPr>
-          <p:cNvPr id="5" name="그림 4">
-            <a:extLst>
-              <a:ext uri="{FF2B5EF4-FFF2-40B4-BE49-F238E27FC236}">
-                <a16:creationId xmlns:a16="http://schemas.microsoft.com/office/drawing/2014/main" id="{937F9F7E-66AF-14F0-F20D-5D5628F6B167}"/>
-              </a:ext>
-            </a:extLst>
-          </p:cNvPr>
-          <p:cNvPicPr>
-            <a:picLocks noChangeAspect="1"/>
-          </p:cNvPicPr>
-          <p:nvPr/>
-        </p:nvPicPr>
-        <p:blipFill>
-          <a:blip r:embed="rId2"/>
-          <a:stretch>
-            <a:fillRect/>
-          </a:stretch>
-        </p:blipFill>
-        <p:spPr>
-          <a:xfrm>
-            <a:off x="3587461" y="1805985"/>
-            <a:ext cx="4495800" cy="3381375"/>
-          </a:xfrm>
-          <a:prstGeom prst="rect">
-            <a:avLst/>
-          </a:prstGeom>
-        </p:spPr>
-      </p:pic>
-      <p:sp>
-        <p:nvSpPr>
-          <p:cNvPr id="6" name="부제목 2">
-            <a:extLst>
-              <a:ext uri="{FF2B5EF4-FFF2-40B4-BE49-F238E27FC236}">
-                <a16:creationId xmlns:a16="http://schemas.microsoft.com/office/drawing/2014/main" id="{3DF79D3C-211C-703E-3014-405841BF6DA7}"/>
-              </a:ext>
-            </a:extLst>
-          </p:cNvPr>
-          <p:cNvSpPr txBox="1">
-            <a:spLocks/>
-          </p:cNvSpPr>
-          <p:nvPr/>
-        </p:nvSpPr>
-        <p:spPr>
-          <a:xfrm>
-            <a:off x="831274" y="1126806"/>
-            <a:ext cx="10008174" cy="367218"/>
-          </a:xfrm>
-          <a:prstGeom prst="rect">
-            <a:avLst/>
-          </a:prstGeom>
-        </p:spPr>
-        <p:txBody>
-          <a:bodyPr vert="horz" lIns="91440" tIns="45720" rIns="91440" bIns="45720" rtlCol="0">
-            <a:normAutofit fontScale="92500" lnSpcReduction="10000"/>
-          </a:bodyPr>
-          <a:lstStyle>
-            <a:lvl1pPr marL="0" indent="0" algn="ctr" defTabSz="914400" rtl="0" eaLnBrk="1" latinLnBrk="1" hangingPunct="1">
-              <a:lnSpc>
-                <a:spcPct val="90000"/>
-              </a:lnSpc>
-              <a:spcBef>
-                <a:spcPts val="1000"/>
-              </a:spcBef>
-              <a:buFont typeface="Arial" panose="020B0604020202020204" pitchFamily="34" charset="0"/>
-              <a:buNone/>
-              <a:defRPr sz="2400" kern="1200">
-                <a:solidFill>
-                  <a:schemeClr val="tx1"/>
-                </a:solidFill>
-                <a:latin typeface="+mn-lt"/>
-                <a:ea typeface="+mn-ea"/>
-                <a:cs typeface="+mn-cs"/>
-              </a:defRPr>
-            </a:lvl1pPr>
-            <a:lvl2pPr marL="457200" indent="0" algn="ctr" defTabSz="914400" rtl="0" eaLnBrk="1" latinLnBrk="1" hangingPunct="1">
-              <a:lnSpc>
-                <a:spcPct val="90000"/>
-              </a:lnSpc>
-              <a:spcBef>
-                <a:spcPts val="500"/>
-              </a:spcBef>
-              <a:buFont typeface="Arial" panose="020B0604020202020204" pitchFamily="34" charset="0"/>
-              <a:buNone/>
-              <a:defRPr sz="2000" kern="1200">
-                <a:solidFill>
-                  <a:schemeClr val="tx1"/>
-                </a:solidFill>
-                <a:latin typeface="+mn-lt"/>
-                <a:ea typeface="+mn-ea"/>
-                <a:cs typeface="+mn-cs"/>
-              </a:defRPr>
-            </a:lvl2pPr>
-            <a:lvl3pPr marL="914400" indent="0" algn="ctr" defTabSz="914400" rtl="0" eaLnBrk="1" latinLnBrk="1" hangingPunct="1">
-              <a:lnSpc>
-                <a:spcPct val="90000"/>
-              </a:lnSpc>
-              <a:spcBef>
-                <a:spcPts val="500"/>
-              </a:spcBef>
-              <a:buFont typeface="Arial" panose="020B0604020202020204" pitchFamily="34" charset="0"/>
-              <a:buNone/>
-              <a:defRPr sz="1800" kern="1200">
-                <a:solidFill>
-                  <a:schemeClr val="tx1"/>
-                </a:solidFill>
-                <a:latin typeface="+mn-lt"/>
-                <a:ea typeface="+mn-ea"/>
-                <a:cs typeface="+mn-cs"/>
-              </a:defRPr>
-            </a:lvl3pPr>
-            <a:lvl4pPr marL="1371600" indent="0" algn="ctr" defTabSz="914400" rtl="0" eaLnBrk="1" latinLnBrk="1" hangingPunct="1">
-              <a:lnSpc>
-                <a:spcPct val="90000"/>
-              </a:lnSpc>
-              <a:spcBef>
-                <a:spcPts val="500"/>
-              </a:spcBef>
-              <a:buFont typeface="Arial" panose="020B0604020202020204" pitchFamily="34" charset="0"/>
-              <a:buNone/>
-              <a:defRPr sz="1600" kern="1200">
-                <a:solidFill>
-                  <a:schemeClr val="tx1"/>
-                </a:solidFill>
-                <a:latin typeface="+mn-lt"/>
-                <a:ea typeface="+mn-ea"/>
-                <a:cs typeface="+mn-cs"/>
-              </a:defRPr>
-            </a:lvl4pPr>
-            <a:lvl5pPr marL="1828800" indent="0" algn="ctr" defTabSz="914400" rtl="0" eaLnBrk="1" latinLnBrk="1" hangingPunct="1">
-              <a:lnSpc>
-                <a:spcPct val="90000"/>
-              </a:lnSpc>
-              <a:spcBef>
-                <a:spcPts val="500"/>
-              </a:spcBef>
-              <a:buFont typeface="Arial" panose="020B0604020202020204" pitchFamily="34" charset="0"/>
-              <a:buNone/>
-              <a:defRPr sz="1600" kern="1200">
-                <a:solidFill>
-                  <a:schemeClr val="tx1"/>
-                </a:solidFill>
-                <a:latin typeface="+mn-lt"/>
-                <a:ea typeface="+mn-ea"/>
-                <a:cs typeface="+mn-cs"/>
-              </a:defRPr>
-            </a:lvl5pPr>
-            <a:lvl6pPr marL="2286000" indent="0" algn="ctr" defTabSz="914400" rtl="0" eaLnBrk="1" latinLnBrk="1" hangingPunct="1">
-              <a:lnSpc>
-                <a:spcPct val="90000"/>
-              </a:lnSpc>
-              <a:spcBef>
-                <a:spcPts val="500"/>
-              </a:spcBef>
-              <a:buFont typeface="Arial" panose="020B0604020202020204" pitchFamily="34" charset="0"/>
-              <a:buNone/>
-              <a:defRPr sz="1600" kern="1200">
-                <a:solidFill>
-                  <a:schemeClr val="tx1"/>
-                </a:solidFill>
-                <a:latin typeface="+mn-lt"/>
-                <a:ea typeface="+mn-ea"/>
-                <a:cs typeface="+mn-cs"/>
-              </a:defRPr>
-            </a:lvl6pPr>
-            <a:lvl7pPr marL="2743200" indent="0" algn="ctr" defTabSz="914400" rtl="0" eaLnBrk="1" latinLnBrk="1" hangingPunct="1">
-              <a:lnSpc>
-                <a:spcPct val="90000"/>
-              </a:lnSpc>
-              <a:spcBef>
-                <a:spcPts val="500"/>
-              </a:spcBef>
-              <a:buFont typeface="Arial" panose="020B0604020202020204" pitchFamily="34" charset="0"/>
-              <a:buNone/>
-              <a:defRPr sz="1600" kern="1200">
-                <a:solidFill>
-                  <a:schemeClr val="tx1"/>
-                </a:solidFill>
-                <a:latin typeface="+mn-lt"/>
-                <a:ea typeface="+mn-ea"/>
-                <a:cs typeface="+mn-cs"/>
-              </a:defRPr>
-            </a:lvl7pPr>
-            <a:lvl8pPr marL="3200400" indent="0" algn="ctr" defTabSz="914400" rtl="0" eaLnBrk="1" latinLnBrk="1" hangingPunct="1">
-              <a:lnSpc>
-                <a:spcPct val="90000"/>
-              </a:lnSpc>
-              <a:spcBef>
-                <a:spcPts val="500"/>
-              </a:spcBef>
-              <a:buFont typeface="Arial" panose="020B0604020202020204" pitchFamily="34" charset="0"/>
-              <a:buNone/>
-              <a:defRPr sz="1600" kern="1200">
-                <a:solidFill>
-                  <a:schemeClr val="tx1"/>
-                </a:solidFill>
-                <a:latin typeface="+mn-lt"/>
-                <a:ea typeface="+mn-ea"/>
-                <a:cs typeface="+mn-cs"/>
-              </a:defRPr>
-            </a:lvl8pPr>
-            <a:lvl9pPr marL="3657600" indent="0" algn="ctr" defTabSz="914400" rtl="0" eaLnBrk="1" latinLnBrk="1" hangingPunct="1">
-              <a:lnSpc>
-                <a:spcPct val="90000"/>
-              </a:lnSpc>
-              <a:spcBef>
-                <a:spcPts val="500"/>
-              </a:spcBef>
-              <a:buFont typeface="Arial" panose="020B0604020202020204" pitchFamily="34" charset="0"/>
-              <a:buNone/>
-              <a:defRPr sz="1600" kern="1200">
-                <a:solidFill>
-                  <a:schemeClr val="tx1"/>
-                </a:solidFill>
-                <a:latin typeface="+mn-lt"/>
-                <a:ea typeface="+mn-ea"/>
-                <a:cs typeface="+mn-cs"/>
-              </a:defRPr>
-            </a:lvl9pPr>
-          </a:lstStyle>
-          <a:p>
-            <a:r>
-              <a:rPr lang="en-US" altLang="ko-KR" b="1" dirty="0"/>
-              <a:t>P.S.2 target </a:t>
-            </a:r>
-            <a:r>
-              <a:rPr lang="ko-KR" altLang="en-US" b="1" dirty="0"/>
-              <a:t>폴더들 안 보이게 하기</a:t>
-            </a:r>
-            <a:endParaRPr lang="en-US" altLang="ko-KR" b="1" dirty="0"/>
-          </a:p>
-        </p:txBody>
-      </p:sp>
-      <mc:AlternateContent xmlns:mc="http://schemas.openxmlformats.org/markup-compatibility/2006" xmlns:p14="http://schemas.microsoft.com/office/powerpoint/2010/main">
-        <mc:Choice Requires="p14">
-          <p:contentPart p14:bwMode="auto" r:id="rId3">
-            <p14:nvContentPartPr>
-              <p14:cNvPr id="7" name="잉크 6">
-                <a:extLst>
-                  <a:ext uri="{FF2B5EF4-FFF2-40B4-BE49-F238E27FC236}">
-                    <a16:creationId xmlns:a16="http://schemas.microsoft.com/office/drawing/2014/main" id="{AB9E1942-B90D-90E8-9807-CADB9694D62C}"/>
-                  </a:ext>
-                </a:extLst>
-              </p14:cNvPr>
-              <p14:cNvContentPartPr/>
-              <p14:nvPr/>
-            </p14:nvContentPartPr>
-            <p14:xfrm>
-              <a:off x="6887623" y="1768727"/>
-              <a:ext cx="311760" cy="256320"/>
-            </p14:xfrm>
-          </p:contentPart>
-        </mc:Choice>
-        <mc:Fallback xmlns="">
-          <p:pic>
-            <p:nvPicPr>
-              <p:cNvPr id="7" name="잉크 6">
-                <a:extLst>
-                  <a:ext uri="{FF2B5EF4-FFF2-40B4-BE49-F238E27FC236}">
-                    <a16:creationId xmlns:a16="http://schemas.microsoft.com/office/drawing/2014/main" id="{AB9E1942-B90D-90E8-9807-CADB9694D62C}"/>
-                  </a:ext>
-                </a:extLst>
-              </p:cNvPr>
-              <p:cNvPicPr/>
-              <p:nvPr/>
-            </p:nvPicPr>
-            <p:blipFill>
-              <a:blip r:embed="rId4"/>
-              <a:stretch>
-                <a:fillRect/>
-              </a:stretch>
-            </p:blipFill>
-            <p:spPr>
-              <a:xfrm>
-                <a:off x="6869623" y="1750727"/>
-                <a:ext cx="347400" cy="291960"/>
-              </a:xfrm>
-              <a:prstGeom prst="rect">
-                <a:avLst/>
-              </a:prstGeom>
-            </p:spPr>
-          </p:pic>
-        </mc:Fallback>
-      </mc:AlternateContent>
-      <mc:AlternateContent xmlns:mc="http://schemas.openxmlformats.org/markup-compatibility/2006" xmlns:p14="http://schemas.microsoft.com/office/powerpoint/2010/main">
-        <mc:Choice Requires="p14">
-          <p:contentPart p14:bwMode="auto" r:id="rId5">
-            <p14:nvContentPartPr>
-              <p14:cNvPr id="9" name="잉크 8">
-                <a:extLst>
-                  <a:ext uri="{FF2B5EF4-FFF2-40B4-BE49-F238E27FC236}">
-                    <a16:creationId xmlns:a16="http://schemas.microsoft.com/office/drawing/2014/main" id="{F6DB3FF1-2826-F727-7CEF-6CCD17926BC3}"/>
-                  </a:ext>
-                </a:extLst>
-              </p14:cNvPr>
-              <p14:cNvContentPartPr/>
-              <p14:nvPr/>
-            </p14:nvContentPartPr>
-            <p14:xfrm>
-              <a:off x="7043503" y="2062305"/>
-              <a:ext cx="406800" cy="295200"/>
-            </p14:xfrm>
-          </p:contentPart>
-        </mc:Choice>
-        <mc:Fallback xmlns="">
-          <p:pic>
-            <p:nvPicPr>
-              <p:cNvPr id="9" name="잉크 8">
-                <a:extLst>
-                  <a:ext uri="{FF2B5EF4-FFF2-40B4-BE49-F238E27FC236}">
-                    <a16:creationId xmlns:a16="http://schemas.microsoft.com/office/drawing/2014/main" id="{F6DB3FF1-2826-F727-7CEF-6CCD17926BC3}"/>
-                  </a:ext>
-                </a:extLst>
-              </p:cNvPr>
-              <p:cNvPicPr/>
-              <p:nvPr/>
-            </p:nvPicPr>
-            <p:blipFill>
-              <a:blip r:embed="rId6"/>
-              <a:stretch>
-                <a:fillRect/>
-              </a:stretch>
-            </p:blipFill>
-            <p:spPr>
-              <a:xfrm>
-                <a:off x="7025503" y="2044305"/>
-                <a:ext cx="442440" cy="330840"/>
-              </a:xfrm>
-              <a:prstGeom prst="rect">
-                <a:avLst/>
-              </a:prstGeom>
-            </p:spPr>
-          </p:pic>
-        </mc:Fallback>
-      </mc:AlternateContent>
-      <p:sp>
-        <p:nvSpPr>
-          <p:cNvPr id="11" name="TextBox 10">
-            <a:extLst>
-              <a:ext uri="{FF2B5EF4-FFF2-40B4-BE49-F238E27FC236}">
-                <a16:creationId xmlns:a16="http://schemas.microsoft.com/office/drawing/2014/main" id="{1933D9B3-7FED-0FFC-15C7-E601AEA4C2AD}"/>
-              </a:ext>
-            </a:extLst>
-          </p:cNvPr>
-          <p:cNvSpPr txBox="1"/>
-          <p:nvPr/>
-        </p:nvSpPr>
-        <p:spPr>
-          <a:xfrm>
-            <a:off x="7430244" y="2244493"/>
-            <a:ext cx="646331" cy="369332"/>
-          </a:xfrm>
-          <a:prstGeom prst="rect">
-            <a:avLst/>
-          </a:prstGeom>
-          <a:noFill/>
-        </p:spPr>
-        <p:txBody>
-          <a:bodyPr wrap="none" rtlCol="0">
-            <a:spAutoFit/>
-          </a:bodyPr>
-          <a:lstStyle/>
-          <a:p>
-            <a:r>
-              <a:rPr lang="ko-KR" altLang="en-US" dirty="0"/>
-              <a:t>클릭</a:t>
-            </a:r>
-          </a:p>
-        </p:txBody>
-      </p:sp>
-    </p:spTree>
-    <p:extLst>
-      <p:ext uri="{BB962C8B-B14F-4D97-AF65-F5344CB8AC3E}">
-        <p14:creationId xmlns:p14="http://schemas.microsoft.com/office/powerpoint/2010/main" val="2601230407"/>
-      </p:ext>
-    </p:extLst>
-  </p:cSld>
-  <p:clrMapOvr>
-    <a:masterClrMapping/>
-  </p:clrMapOvr>
-</p:sld>
-</file>
-
-<file path=ppt/slides/slide6.xml><?xml version="1.0" encoding="utf-8"?>
-<p:sld xmlns:a="http://schemas.openxmlformats.org/drawingml/2006/main" xmlns:r="http://schemas.openxmlformats.org/officeDocument/2006/relationships" xmlns:p="http://schemas.openxmlformats.org/presentationml/2006/main">
-  <p:cSld>
-    <p:spTree>
-      <p:nvGrpSpPr>
-        <p:cNvPr id="1" name="">
-          <a:extLst>
-            <a:ext uri="{FF2B5EF4-FFF2-40B4-BE49-F238E27FC236}">
-              <a16:creationId xmlns:a16="http://schemas.microsoft.com/office/drawing/2014/main" id="{784290C7-83BA-65F3-97FC-16FF1892F5AD}"/>
-            </a:ext>
-          </a:extLst>
-        </p:cNvPr>
-        <p:cNvGrpSpPr/>
-        <p:nvPr/>
-      </p:nvGrpSpPr>
-      <p:grpSpPr>
-        <a:xfrm>
-          <a:off x="0" y="0"/>
-          <a:ext cx="0" cy="0"/>
-          <a:chOff x="0" y="0"/>
-          <a:chExt cx="0" cy="0"/>
-        </a:xfrm>
-      </p:grpSpPr>
-      <p:pic>
-        <p:nvPicPr>
-          <p:cNvPr id="3" name="그림 2">
-            <a:extLst>
-              <a:ext uri="{FF2B5EF4-FFF2-40B4-BE49-F238E27FC236}">
-                <a16:creationId xmlns:a16="http://schemas.microsoft.com/office/drawing/2014/main" id="{24CC771E-7C25-9E5D-8200-B09160A16868}"/>
-              </a:ext>
-            </a:extLst>
-          </p:cNvPr>
-          <p:cNvPicPr>
-            <a:picLocks noChangeAspect="1"/>
-          </p:cNvPicPr>
-          <p:nvPr/>
-        </p:nvPicPr>
-        <p:blipFill>
-          <a:blip r:embed="rId2"/>
-          <a:stretch>
-            <a:fillRect/>
-          </a:stretch>
-        </p:blipFill>
-        <p:spPr>
-          <a:xfrm>
-            <a:off x="626143" y="456796"/>
-            <a:ext cx="4572000" cy="4457700"/>
-          </a:xfrm>
-          <a:prstGeom prst="rect">
-            <a:avLst/>
-          </a:prstGeom>
-        </p:spPr>
-      </p:pic>
-      <mc:AlternateContent xmlns:mc="http://schemas.openxmlformats.org/markup-compatibility/2006" xmlns:p14="http://schemas.microsoft.com/office/powerpoint/2010/main">
-        <mc:Choice Requires="p14">
-          <p:contentPart p14:bwMode="auto" r:id="rId3">
-            <p14:nvContentPartPr>
-              <p14:cNvPr id="8" name="잉크 7">
-                <a:extLst>
-                  <a:ext uri="{FF2B5EF4-FFF2-40B4-BE49-F238E27FC236}">
-                    <a16:creationId xmlns:a16="http://schemas.microsoft.com/office/drawing/2014/main" id="{F2A3B369-4432-9AC4-ABA0-7040973F1FB6}"/>
-                  </a:ext>
-                </a:extLst>
-              </p14:cNvPr>
-              <p14:cNvContentPartPr/>
-              <p14:nvPr/>
-            </p14:nvContentPartPr>
-            <p14:xfrm>
-              <a:off x="1844956" y="794556"/>
-              <a:ext cx="646200" cy="339840"/>
-            </p14:xfrm>
-          </p:contentPart>
-        </mc:Choice>
-        <mc:Fallback xmlns="">
-          <p:pic>
-            <p:nvPicPr>
-              <p:cNvPr id="8" name="잉크 7">
-                <a:extLst>
-                  <a:ext uri="{FF2B5EF4-FFF2-40B4-BE49-F238E27FC236}">
-                    <a16:creationId xmlns:a16="http://schemas.microsoft.com/office/drawing/2014/main" id="{F2A3B369-4432-9AC4-ABA0-7040973F1FB6}"/>
-                  </a:ext>
-                </a:extLst>
-              </p:cNvPr>
-              <p:cNvPicPr/>
-              <p:nvPr/>
-            </p:nvPicPr>
-            <p:blipFill>
-              <a:blip r:embed="rId4"/>
-              <a:stretch>
-                <a:fillRect/>
-              </a:stretch>
-            </p:blipFill>
-            <p:spPr>
-              <a:xfrm>
-                <a:off x="1826946" y="776556"/>
-                <a:ext cx="681860" cy="375480"/>
-              </a:xfrm>
-              <a:prstGeom prst="rect">
-                <a:avLst/>
-              </a:prstGeom>
-            </p:spPr>
-          </p:pic>
-        </mc:Fallback>
-      </mc:AlternateContent>
-      <mc:AlternateContent xmlns:mc="http://schemas.openxmlformats.org/markup-compatibility/2006" xmlns:p14="http://schemas.microsoft.com/office/powerpoint/2010/main">
-        <mc:Choice Requires="p14">
-          <p:contentPart p14:bwMode="auto" r:id="rId5">
-            <p14:nvContentPartPr>
-              <p14:cNvPr id="10" name="잉크 9">
-                <a:extLst>
-                  <a:ext uri="{FF2B5EF4-FFF2-40B4-BE49-F238E27FC236}">
-                    <a16:creationId xmlns:a16="http://schemas.microsoft.com/office/drawing/2014/main" id="{75FFED71-E49F-AF72-F5EC-9A04FF84BFE0}"/>
-                  </a:ext>
-                </a:extLst>
-              </p14:cNvPr>
-              <p14:cNvContentPartPr/>
-              <p14:nvPr/>
-            </p14:nvContentPartPr>
-            <p14:xfrm>
-              <a:off x="4443038" y="1428569"/>
-              <a:ext cx="474840" cy="370080"/>
-            </p14:xfrm>
-          </p:contentPart>
-        </mc:Choice>
-        <mc:Fallback xmlns="">
-          <p:pic>
-            <p:nvPicPr>
-              <p:cNvPr id="10" name="잉크 9">
-                <a:extLst>
-                  <a:ext uri="{FF2B5EF4-FFF2-40B4-BE49-F238E27FC236}">
-                    <a16:creationId xmlns:a16="http://schemas.microsoft.com/office/drawing/2014/main" id="{75FFED71-E49F-AF72-F5EC-9A04FF84BFE0}"/>
-                  </a:ext>
-                </a:extLst>
-              </p:cNvPr>
-              <p:cNvPicPr/>
-              <p:nvPr/>
-            </p:nvPicPr>
-            <p:blipFill>
-              <a:blip r:embed="rId6"/>
-              <a:stretch>
-                <a:fillRect/>
-              </a:stretch>
-            </p:blipFill>
-            <p:spPr>
-              <a:xfrm>
-                <a:off x="4425038" y="1410569"/>
-                <a:ext cx="510480" cy="405720"/>
-              </a:xfrm>
-              <a:prstGeom prst="rect">
-                <a:avLst/>
-              </a:prstGeom>
-            </p:spPr>
-          </p:pic>
-        </mc:Fallback>
-      </mc:AlternateContent>
-      <p:pic>
-        <p:nvPicPr>
-          <p:cNvPr id="2" name="그림 1">
-            <a:extLst>
-              <a:ext uri="{FF2B5EF4-FFF2-40B4-BE49-F238E27FC236}">
-                <a16:creationId xmlns:a16="http://schemas.microsoft.com/office/drawing/2014/main" id="{51971F72-F634-C35A-0A93-6B7BBC978A2A}"/>
-              </a:ext>
-            </a:extLst>
-          </p:cNvPr>
-          <p:cNvPicPr>
-            <a:picLocks noChangeAspect="1"/>
-          </p:cNvPicPr>
-          <p:nvPr/>
-        </p:nvPicPr>
-        <p:blipFill>
-          <a:blip r:embed="rId7"/>
-          <a:stretch>
-            <a:fillRect/>
-          </a:stretch>
-        </p:blipFill>
-        <p:spPr>
-          <a:xfrm>
-            <a:off x="6282344" y="456796"/>
-            <a:ext cx="4572000" cy="4457700"/>
-          </a:xfrm>
-          <a:prstGeom prst="rect">
-            <a:avLst/>
-          </a:prstGeom>
-        </p:spPr>
-      </p:pic>
-      <p:sp>
-        <p:nvSpPr>
-          <p:cNvPr id="4" name="TextBox 3">
-            <a:extLst>
-              <a:ext uri="{FF2B5EF4-FFF2-40B4-BE49-F238E27FC236}">
-                <a16:creationId xmlns:a16="http://schemas.microsoft.com/office/drawing/2014/main" id="{C661E41A-8D02-3950-ECFB-1FE50FD4D710}"/>
-              </a:ext>
-            </a:extLst>
-          </p:cNvPr>
-          <p:cNvSpPr txBox="1"/>
-          <p:nvPr/>
-        </p:nvSpPr>
-        <p:spPr>
-          <a:xfrm>
-            <a:off x="7334054" y="5068972"/>
-            <a:ext cx="2303964" cy="1200329"/>
-          </a:xfrm>
-          <a:prstGeom prst="rect">
-            <a:avLst/>
-          </a:prstGeom>
-          <a:noFill/>
-        </p:spPr>
-        <p:txBody>
-          <a:bodyPr wrap="none" rtlCol="0">
-            <a:spAutoFit/>
-          </a:bodyPr>
-          <a:lstStyle/>
-          <a:p>
-            <a:r>
-              <a:rPr lang="en-US" altLang="ko-KR" sz="2400" b="1" dirty="0"/>
-              <a:t>1. target* </a:t>
-            </a:r>
-            <a:r>
-              <a:rPr lang="ko-KR" altLang="en-US" sz="2400" b="1" dirty="0"/>
-              <a:t>입력</a:t>
-            </a:r>
-            <a:br>
-              <a:rPr lang="en-US" altLang="ko-KR" sz="2400" b="1" dirty="0"/>
-            </a:br>
-            <a:r>
-              <a:rPr lang="en-US" altLang="ko-KR" sz="2400" b="1" dirty="0"/>
-              <a:t>2. </a:t>
-            </a:r>
-            <a:r>
-              <a:rPr lang="ko-KR" altLang="en-US" sz="2400" b="1" dirty="0"/>
-              <a:t>체크</a:t>
-            </a:r>
-            <a:endParaRPr lang="en-US" altLang="ko-KR" sz="2400" b="1" dirty="0"/>
-          </a:p>
-          <a:p>
-            <a:r>
-              <a:rPr lang="en-US" altLang="ko-KR" sz="2400" b="1" dirty="0"/>
-              <a:t>3. OK</a:t>
-            </a:r>
-            <a:endParaRPr lang="ko-KR" altLang="en-US" sz="2400" b="1" dirty="0"/>
-          </a:p>
-        </p:txBody>
-      </p:sp>
-    </p:spTree>
-    <p:extLst>
-      <p:ext uri="{BB962C8B-B14F-4D97-AF65-F5344CB8AC3E}">
-        <p14:creationId xmlns:p14="http://schemas.microsoft.com/office/powerpoint/2010/main" val="676096516"/>
-      </p:ext>
-    </p:extLst>
-  </p:cSld>
-  <p:clrMapOvr>
-    <a:masterClrMapping/>
-  </p:clrMapOvr>
-</p:sld>
-</file>
-
 <file path=ppt/theme/theme1.xml><?xml version="1.0" encoding="utf-8"?>
 <a:theme xmlns:a="http://schemas.openxmlformats.org/drawingml/2006/main" name="Office 테마">
   <a:themeElements>
